--- a/환경경제학/25-2 환경경제학/ERE_Lecture_2_한글_수정.pptx
+++ b/환경경제학/25-2 환경경제학/ERE_Lecture_2_한글_수정.pptx
@@ -237,7 +237,7 @@
           <a:p>
             <a:fld id="{4A5E00EF-AEA4-43E2-9451-8F9C59A39471}" type="datetimeFigureOut">
               <a:rPr lang="ko-KR" altLang="en-US" smtClean="0"/>
-              <a:t>2025-09-29</a:t>
+              <a:t>2026-09-08</a:t>
             </a:fld>
             <a:endParaRPr lang="ko-KR" altLang="en-US"/>
           </a:p>
@@ -743,7 +743,7 @@
           <a:p>
             <a:fld id="{CD32C56F-BD27-4999-9E6D-D4EACE3DA9F4}" type="datetime1">
               <a:rPr lang="ko-KR" altLang="en-US" smtClean="0"/>
-              <a:t>2025-09-29</a:t>
+              <a:t>2026-09-08</a:t>
             </a:fld>
             <a:endParaRPr lang="ko-KR" altLang="en-US"/>
           </a:p>
@@ -957,7 +957,7 @@
           <a:p>
             <a:fld id="{8EF4A19C-72C8-45CA-8E3F-68A7FA345D6C}" type="datetime1">
               <a:rPr lang="ko-KR" altLang="en-US" smtClean="0"/>
-              <a:t>2025-09-29</a:t>
+              <a:t>2026-09-08</a:t>
             </a:fld>
             <a:endParaRPr lang="ko-KR" altLang="en-US"/>
           </a:p>
@@ -1181,7 +1181,7 @@
           <a:p>
             <a:fld id="{56A175B2-010B-4341-954C-5F8F5C70B124}" type="datetime1">
               <a:rPr lang="ko-KR" altLang="en-US" smtClean="0"/>
-              <a:t>2025-09-29</a:t>
+              <a:t>2026-09-08</a:t>
             </a:fld>
             <a:endParaRPr lang="ko-KR" altLang="en-US"/>
           </a:p>
@@ -1395,7 +1395,7 @@
           <a:p>
             <a:fld id="{16B83F9E-22C9-45CA-9E85-070F1D3EF530}" type="datetime1">
               <a:rPr lang="ko-KR" altLang="en-US" smtClean="0"/>
-              <a:t>2025-09-29</a:t>
+              <a:t>2026-09-08</a:t>
             </a:fld>
             <a:endParaRPr lang="ko-KR" altLang="en-US"/>
           </a:p>
@@ -1686,7 +1686,7 @@
           <a:p>
             <a:fld id="{03278F45-FB3C-4C4D-B89A-7BC3F5F229F6}" type="datetime1">
               <a:rPr lang="ko-KR" altLang="en-US" smtClean="0"/>
-              <a:t>2025-09-29</a:t>
+              <a:t>2026-09-08</a:t>
             </a:fld>
             <a:endParaRPr lang="ko-KR" altLang="en-US"/>
           </a:p>
@@ -2079,7 +2079,7 @@
           <a:p>
             <a:fld id="{38FDAC3C-35A6-415C-9F03-738A6AC328B1}" type="datetime1">
               <a:rPr lang="ko-KR" altLang="en-US" smtClean="0"/>
-              <a:t>2025-09-29</a:t>
+              <a:t>2026-09-08</a:t>
             </a:fld>
             <a:endParaRPr lang="ko-KR" altLang="en-US"/>
           </a:p>
@@ -3673,7 +3673,7 @@
           <a:p>
             <a:fld id="{507A0DF1-AEE6-4B0D-89D2-351E7B3EF65C}" type="datetime1">
               <a:rPr lang="ko-KR" altLang="en-US" smtClean="0"/>
-              <a:t>2025-09-29</a:t>
+              <a:t>2026-09-08</a:t>
             </a:fld>
             <a:endParaRPr lang="ko-KR" altLang="en-US"/>
           </a:p>
@@ -4101,7 +4101,7 @@
           <a:p>
             <a:fld id="{CA93B8C9-630F-4D57-944D-04FD37CECCD3}" type="datetime1">
               <a:rPr lang="ko-KR" altLang="en-US" smtClean="0"/>
-              <a:t>2025-09-29</a:t>
+              <a:t>2026-09-08</a:t>
             </a:fld>
             <a:endParaRPr lang="ko-KR" altLang="en-US"/>
           </a:p>
@@ -4258,7 +4258,7 @@
           <a:p>
             <a:fld id="{E986165A-AC43-4902-9541-874ECD310BA3}" type="datetime1">
               <a:rPr lang="ko-KR" altLang="en-US" smtClean="0"/>
-              <a:t>2025-09-29</a:t>
+              <a:t>2026-09-08</a:t>
             </a:fld>
             <a:endParaRPr lang="ko-KR" altLang="en-US"/>
           </a:p>
@@ -4585,7 +4585,7 @@
           <a:p>
             <a:fld id="{47E6EE6D-2B0E-43A9-87A2-7354CDB998F4}" type="datetime1">
               <a:rPr lang="ko-KR" altLang="en-US" smtClean="0"/>
-              <a:t>2025-09-29</a:t>
+              <a:t>2026-09-08</a:t>
             </a:fld>
             <a:endParaRPr lang="ko-KR" altLang="en-US"/>
           </a:p>
@@ -4889,7 +4889,7 @@
           <a:p>
             <a:fld id="{5CC5944E-0BC8-4FAA-9F94-6B4B05834E10}" type="datetime1">
               <a:rPr lang="ko-KR" altLang="en-US" smtClean="0"/>
-              <a:t>2025-09-29</a:t>
+              <a:t>2026-09-08</a:t>
             </a:fld>
             <a:endParaRPr lang="ko-KR" altLang="en-US"/>
           </a:p>
@@ -7495,14 +7495,11 @@
                 <a:pPr/>
                 <a14:m>
                   <m:oMathPara xmlns:m="http://schemas.openxmlformats.org/officeDocument/2006/math">
-                    <m:oMathParaPr>
-                      <m:jc m:val="centerGroup"/>
-                    </m:oMathParaPr>
-                    <m:oMath xmlns:m="http://schemas.openxmlformats.org/officeDocument/2006/math">
+                    <m:oMath>
                       <m:sSub>
                         <m:sSubPr>
                           <m:ctrlPr>
-                            <a:rPr lang="en-US" altLang="ko-KR" i="1" smtClean="0">
+                            <a:rPr lang="en-US" altLang="ko-KR" b="0" i="1" smtClean="0">
                               <a:latin typeface="Cambria Math" panose="02040503050406030204" pitchFamily="18" charset="0"/>
                             </a:rPr>
                           </m:ctrlPr>
@@ -7668,14 +7665,11 @@
                 <a:pPr/>
                 <a14:m>
                   <m:oMathPara xmlns:m="http://schemas.openxmlformats.org/officeDocument/2006/math">
-                    <m:oMathParaPr>
-                      <m:jc m:val="centerGroup"/>
-                    </m:oMathParaPr>
-                    <m:oMath xmlns:m="http://schemas.openxmlformats.org/officeDocument/2006/math">
+                    <m:oMath>
                       <m:sSub>
                         <m:sSubPr>
                           <m:ctrlPr>
-                            <a:rPr lang="en-US" altLang="ko-KR" i="1" smtClean="0">
+                            <a:rPr lang="en-US" altLang="ko-KR" b="0" i="1" smtClean="0">
                               <a:latin typeface="Cambria Math" panose="02040503050406030204" pitchFamily="18" charset="0"/>
                             </a:rPr>
                           </m:ctrlPr>
@@ -7871,14 +7865,11 @@
                 <a:pPr/>
                 <a14:m>
                   <m:oMathPara xmlns:m="http://schemas.openxmlformats.org/officeDocument/2006/math">
-                    <m:oMathParaPr>
-                      <m:jc m:val="centerGroup"/>
-                    </m:oMathParaPr>
-                    <m:oMath xmlns:m="http://schemas.openxmlformats.org/officeDocument/2006/math">
+                    <m:oMath>
                       <m:sSub>
                         <m:sSubPr>
                           <m:ctrlPr>
-                            <a:rPr lang="en-US" altLang="ko-KR" i="1" smtClean="0">
+                            <a:rPr lang="en-US" altLang="ko-KR" b="0" i="1" smtClean="0">
                               <a:latin typeface="Cambria Math" panose="02040503050406030204" pitchFamily="18" charset="0"/>
                             </a:rPr>
                           </m:ctrlPr>
@@ -8504,7 +8495,7 @@
                     <m:sSub>
                       <m:sSubPr>
                         <m:ctrlPr>
-                          <a:rPr lang="en-US" altLang="ko-KR" sz="1600" i="1" smtClean="0">
+                          <a:rPr lang="en-US" altLang="ko-KR" sz="1600" b="0" i="1" smtClean="0">
                             <a:latin typeface="Cambria Math" panose="02040503050406030204" pitchFamily="18" charset="0"/>
                           </a:rPr>
                         </m:ctrlPr>
@@ -12510,8 +12501,8 @@
           </a:p>
         </p:txBody>
       </p:sp>
-      <mc:AlternateContent xmlns:mc="http://schemas.openxmlformats.org/markup-compatibility/2006">
-        <mc:Choice xmlns:a14="http://schemas.microsoft.com/office/drawing/2010/main" Requires="a14">
+      <mc:AlternateContent xmlns:mc="http://schemas.openxmlformats.org/markup-compatibility/2006" xmlns:a14="http://schemas.microsoft.com/office/drawing/2010/main">
+        <mc:Choice Requires="a14">
           <p:graphicFrame>
             <p:nvGraphicFramePr>
               <p:cNvPr id="3" name="표 2">
@@ -15932,7 +15923,7 @@
             </a:graphic>
           </p:graphicFrame>
         </mc:Choice>
-        <mc:Fallback>
+        <mc:Fallback xmlns="">
           <p:graphicFrame>
             <p:nvGraphicFramePr>
               <p:cNvPr id="3" name="표 2">
@@ -19652,8 +19643,8 @@
           </a:p>
         </p:txBody>
       </p:sp>
-      <mc:AlternateContent xmlns:mc="http://schemas.openxmlformats.org/markup-compatibility/2006">
-        <mc:Choice xmlns:a14="http://schemas.microsoft.com/office/drawing/2010/main" Requires="a14">
+      <mc:AlternateContent xmlns:mc="http://schemas.openxmlformats.org/markup-compatibility/2006" xmlns:a14="http://schemas.microsoft.com/office/drawing/2010/main">
+        <mc:Choice Requires="a14">
           <p:sp>
             <p:nvSpPr>
               <p:cNvPr id="18" name="TextBox 17">
@@ -19849,7 +19840,7 @@
                       <m:barPr>
                         <m:pos m:val="top"/>
                         <m:ctrlPr>
-                          <a:rPr lang="en-US" altLang="ko-KR" sz="1600" i="1" spc="-50" smtClean="0">
+                          <a:rPr lang="en-US" altLang="ko-KR" sz="1600" b="0" i="1" spc="-50" smtClean="0">
                             <a:latin typeface="Cambria Math" panose="02040503050406030204" pitchFamily="18" charset="0"/>
                           </a:rPr>
                         </m:ctrlPr>
@@ -19908,7 +19899,7 @@
                   <a:t>** </a:t>
                 </a:r>
                 <a:r>
-                  <a:rPr lang="ko-KR" altLang="en-US" sz="1600" spc="-50"/>
+                  <a:rPr lang="ko-KR" altLang="en-US" sz="1600" spc="-50" dirty="0"/>
                   <a:t>보다 많은 배가 어업을 하면 손실이 발생함</a:t>
                 </a:r>
                 <a:endParaRPr lang="en-US" altLang="ko-KR" sz="1600" spc="-50" dirty="0"/>
@@ -19916,7 +19907,7 @@
             </p:txBody>
           </p:sp>
         </mc:Choice>
-        <mc:Fallback>
+        <mc:Fallback xmlns="">
           <p:sp>
             <p:nvSpPr>
               <p:cNvPr id="18" name="TextBox 17">
@@ -25923,14 +25914,11 @@
                 <a:pPr/>
                 <a14:m>
                   <m:oMathPara xmlns:m="http://schemas.openxmlformats.org/officeDocument/2006/math">
-                    <m:oMathParaPr>
-                      <m:jc m:val="centerGroup"/>
-                    </m:oMathParaPr>
-                    <m:oMath xmlns:m="http://schemas.openxmlformats.org/officeDocument/2006/math">
+                    <m:oMath>
                       <m:sSub>
                         <m:sSubPr>
                           <m:ctrlPr>
-                            <a:rPr lang="en-US" altLang="ko-KR" i="1" smtClean="0">
+                            <a:rPr lang="en-US" altLang="ko-KR" b="0" i="1" smtClean="0">
                               <a:latin typeface="Cambria Math" panose="02040503050406030204" pitchFamily="18" charset="0"/>
                             </a:rPr>
                           </m:ctrlPr>
@@ -26096,14 +26084,11 @@
                 <a:pPr/>
                 <a14:m>
                   <m:oMathPara xmlns:m="http://schemas.openxmlformats.org/officeDocument/2006/math">
-                    <m:oMathParaPr>
-                      <m:jc m:val="centerGroup"/>
-                    </m:oMathParaPr>
-                    <m:oMath xmlns:m="http://schemas.openxmlformats.org/officeDocument/2006/math">
+                    <m:oMath>
                       <m:sSub>
                         <m:sSubPr>
                           <m:ctrlPr>
-                            <a:rPr lang="en-US" altLang="ko-KR" i="1" smtClean="0">
+                            <a:rPr lang="en-US" altLang="ko-KR" b="0" i="1" smtClean="0">
                               <a:latin typeface="Cambria Math" panose="02040503050406030204" pitchFamily="18" charset="0"/>
                             </a:rPr>
                           </m:ctrlPr>
@@ -26269,14 +26254,11 @@
                 <a:pPr/>
                 <a14:m>
                   <m:oMathPara xmlns:m="http://schemas.openxmlformats.org/officeDocument/2006/math">
-                    <m:oMathParaPr>
-                      <m:jc m:val="centerGroup"/>
-                    </m:oMathParaPr>
-                    <m:oMath xmlns:m="http://schemas.openxmlformats.org/officeDocument/2006/math">
+                    <m:oMath>
                       <m:sSub>
                         <m:sSubPr>
                           <m:ctrlPr>
-                            <a:rPr lang="en-US" altLang="ko-KR" i="1" smtClean="0">
+                            <a:rPr lang="en-US" altLang="ko-KR" b="0" i="1" smtClean="0">
                               <a:latin typeface="Cambria Math" panose="02040503050406030204" pitchFamily="18" charset="0"/>
                             </a:rPr>
                           </m:ctrlPr>
